--- a/e2e/fixtures/chart-top-axis.pptx
+++ b/e2e/fixtures/chart-top-axis.pptx
@@ -565,12 +565,10 @@
           <a:bodyPr wrap="square"/>
           <a:lstStyle/>
           <a:p>
-            <a:pPr/>
             <a:r>
               <a:rPr lang="en-US" dirty="0"/>
               <a:t>Top Axis Bar</a:t>
             </a:r>
-            <a:endParaRPr lang="en-US"/>
           </a:p>
         </p:txBody>
       </p:sp>
